--- a/examples/playground/_out/04_sales_playbook.pptx
+++ b/examples/playground/_out/04_sales_playbook.pptx
@@ -5301,7 +5301,9 @@
           </a:fontRef>
         </p:style>
         <p:txBody>
-          <a:bodyPr rtlCol="0" anchor="ctr" wrap="square" lIns="127000" rIns="127000" tIns="177800" bIns="127000"/>
+          <a:bodyPr rtlCol="0" anchor="ctr" wrap="square" lIns="127000" rIns="127000" tIns="177800" bIns="127000">
+            <a:normAutofit/>
+          </a:bodyPr>
           <a:lstStyle/>
           <a:p>
             <a:pPr algn="ctr">
